--- a/public/videos/repositories/flea-price-watch/flea-price-watch-tech-preview.pptx
+++ b/public/videos/repositories/flea-price-watch/flea-price-watch-tech-preview.pptx
@@ -134,7 +134,7 @@
           <p:cNvPr id="2" name="タイトル 1">
             <a:extLst>
               <a:ext uri="{FF2B5EF4-FFF2-40B4-BE49-F238E27FC236}">
-                <a16:creationId xmlns:a16="http://schemas.microsoft.com/office/drawing/2014/main" id="{AE9D8509-8A59-8104-15F9-B5AA6D0198EC}"/>
+                <a16:creationId xmlns:a16="http://schemas.microsoft.com/office/drawing/2014/main" id="{0AD07DB5-3B24-156E-38CF-AF414C17550F}"/>
               </a:ext>
             </a:extLst>
           </p:cNvPr>
@@ -171,7 +171,7 @@
           <p:cNvPr id="3" name="字幕 2">
             <a:extLst>
               <a:ext uri="{FF2B5EF4-FFF2-40B4-BE49-F238E27FC236}">
-                <a16:creationId xmlns:a16="http://schemas.microsoft.com/office/drawing/2014/main" id="{88901D53-9C7D-969F-F297-AA264C73DAD9}"/>
+                <a16:creationId xmlns:a16="http://schemas.microsoft.com/office/drawing/2014/main" id="{03DBEA27-D671-082B-A41C-4C4C7A0864F6}"/>
               </a:ext>
             </a:extLst>
           </p:cNvPr>
@@ -241,7 +241,7 @@
           <p:cNvPr id="4" name="日付プレースホルダー 3">
             <a:extLst>
               <a:ext uri="{FF2B5EF4-FFF2-40B4-BE49-F238E27FC236}">
-                <a16:creationId xmlns:a16="http://schemas.microsoft.com/office/drawing/2014/main" id="{6D859BFB-DB9D-7145-0638-8D6CA34751AF}"/>
+                <a16:creationId xmlns:a16="http://schemas.microsoft.com/office/drawing/2014/main" id="{92D30FE8-E4A3-A1FC-239D-2AAADD202824}"/>
               </a:ext>
             </a:extLst>
           </p:cNvPr>
@@ -257,7 +257,7 @@
           <a:bodyPr/>
           <a:lstStyle/>
           <a:p>
-            <a:fld id="{BDF9E524-444D-42E1-A37D-856CCDBEF80D}" type="datetimeFigureOut">
+            <a:fld id="{9E36C393-6375-4B6A-910C-D8F668D1D124}" type="datetimeFigureOut">
               <a:rPr kumimoji="1" lang="ja-JP" altLang="en-US" smtClean="0"/>
               <a:t>2026/7/30</a:t>
             </a:fld>
@@ -270,7 +270,7 @@
           <p:cNvPr id="5" name="フッター プレースホルダー 4">
             <a:extLst>
               <a:ext uri="{FF2B5EF4-FFF2-40B4-BE49-F238E27FC236}">
-                <a16:creationId xmlns:a16="http://schemas.microsoft.com/office/drawing/2014/main" id="{638CD92F-D567-1BEA-B2E0-9E1924E39C5C}"/>
+                <a16:creationId xmlns:a16="http://schemas.microsoft.com/office/drawing/2014/main" id="{6782AD5D-4722-AA60-793C-15200530C638}"/>
               </a:ext>
             </a:extLst>
           </p:cNvPr>
@@ -295,7 +295,7 @@
           <p:cNvPr id="6" name="スライド番号プレースホルダー 5">
             <a:extLst>
               <a:ext uri="{FF2B5EF4-FFF2-40B4-BE49-F238E27FC236}">
-                <a16:creationId xmlns:a16="http://schemas.microsoft.com/office/drawing/2014/main" id="{D5A79068-C000-FD66-ACCF-0F25EF930C25}"/>
+                <a16:creationId xmlns:a16="http://schemas.microsoft.com/office/drawing/2014/main" id="{CDC092EB-7C51-C235-382B-5AADDE470973}"/>
               </a:ext>
             </a:extLst>
           </p:cNvPr>
@@ -311,7 +311,7 @@
           <a:bodyPr/>
           <a:lstStyle/>
           <a:p>
-            <a:fld id="{53568302-EB8F-42C1-853D-02762BEE82E9}" type="slidenum">
+            <a:fld id="{A094DCAC-7CC2-42C0-B2FE-182DD5D9BC28}" type="slidenum">
               <a:rPr kumimoji="1" lang="ja-JP" altLang="en-US" smtClean="0"/>
               <a:t>‹#›</a:t>
             </a:fld>
@@ -322,7 +322,7 @@
     </p:spTree>
     <p:extLst>
       <p:ext uri="{BB962C8B-B14F-4D97-AF65-F5344CB8AC3E}">
-        <p14:creationId xmlns:p14="http://schemas.microsoft.com/office/powerpoint/2010/main" val="2692490837"/>
+        <p14:creationId xmlns:p14="http://schemas.microsoft.com/office/powerpoint/2010/main" val="1950040641"/>
       </p:ext>
     </p:extLst>
   </p:cSld>
@@ -354,7 +354,7 @@
           <p:cNvPr id="2" name="タイトル 1">
             <a:extLst>
               <a:ext uri="{FF2B5EF4-FFF2-40B4-BE49-F238E27FC236}">
-                <a16:creationId xmlns:a16="http://schemas.microsoft.com/office/drawing/2014/main" id="{3465C9F8-BE1E-9BA4-DDFB-48A38F40D539}"/>
+                <a16:creationId xmlns:a16="http://schemas.microsoft.com/office/drawing/2014/main" id="{C01A45E6-EA12-0DC1-D40B-AD82096C6C01}"/>
               </a:ext>
             </a:extLst>
           </p:cNvPr>
@@ -382,7 +382,7 @@
           <p:cNvPr id="3" name="縦書きテキスト プレースホルダー 2">
             <a:extLst>
               <a:ext uri="{FF2B5EF4-FFF2-40B4-BE49-F238E27FC236}">
-                <a16:creationId xmlns:a16="http://schemas.microsoft.com/office/drawing/2014/main" id="{4CD9B071-8E9C-4EE4-0854-2D9E08661E50}"/>
+                <a16:creationId xmlns:a16="http://schemas.microsoft.com/office/drawing/2014/main" id="{3CB33DDB-086A-17F2-A253-D9F54D271320}"/>
               </a:ext>
             </a:extLst>
           </p:cNvPr>
@@ -471,7 +471,7 @@
           <p:cNvPr id="4" name="日付プレースホルダー 3">
             <a:extLst>
               <a:ext uri="{FF2B5EF4-FFF2-40B4-BE49-F238E27FC236}">
-                <a16:creationId xmlns:a16="http://schemas.microsoft.com/office/drawing/2014/main" id="{5A30A1E4-3164-D028-4C14-31F4DF5B3A99}"/>
+                <a16:creationId xmlns:a16="http://schemas.microsoft.com/office/drawing/2014/main" id="{9B312BA5-960D-05EF-39F4-B4B5005A578A}"/>
               </a:ext>
             </a:extLst>
           </p:cNvPr>
@@ -487,7 +487,7 @@
           <a:bodyPr/>
           <a:lstStyle/>
           <a:p>
-            <a:fld id="{BDF9E524-444D-42E1-A37D-856CCDBEF80D}" type="datetimeFigureOut">
+            <a:fld id="{9E36C393-6375-4B6A-910C-D8F668D1D124}" type="datetimeFigureOut">
               <a:rPr kumimoji="1" lang="ja-JP" altLang="en-US" smtClean="0"/>
               <a:t>2026/7/30</a:t>
             </a:fld>
@@ -500,7 +500,7 @@
           <p:cNvPr id="5" name="フッター プレースホルダー 4">
             <a:extLst>
               <a:ext uri="{FF2B5EF4-FFF2-40B4-BE49-F238E27FC236}">
-                <a16:creationId xmlns:a16="http://schemas.microsoft.com/office/drawing/2014/main" id="{2253F67F-55D9-045C-A8DD-739C76C65EA9}"/>
+                <a16:creationId xmlns:a16="http://schemas.microsoft.com/office/drawing/2014/main" id="{61F68D43-CF28-8FC2-1270-BC09BB2790B1}"/>
               </a:ext>
             </a:extLst>
           </p:cNvPr>
@@ -525,7 +525,7 @@
           <p:cNvPr id="6" name="スライド番号プレースホルダー 5">
             <a:extLst>
               <a:ext uri="{FF2B5EF4-FFF2-40B4-BE49-F238E27FC236}">
-                <a16:creationId xmlns:a16="http://schemas.microsoft.com/office/drawing/2014/main" id="{6230090C-9015-18B9-3C58-C6534587ECEB}"/>
+                <a16:creationId xmlns:a16="http://schemas.microsoft.com/office/drawing/2014/main" id="{6855F4A3-381D-85CD-27D9-C7A6EAE8ABD3}"/>
               </a:ext>
             </a:extLst>
           </p:cNvPr>
@@ -541,7 +541,7 @@
           <a:bodyPr/>
           <a:lstStyle/>
           <a:p>
-            <a:fld id="{53568302-EB8F-42C1-853D-02762BEE82E9}" type="slidenum">
+            <a:fld id="{A094DCAC-7CC2-42C0-B2FE-182DD5D9BC28}" type="slidenum">
               <a:rPr kumimoji="1" lang="ja-JP" altLang="en-US" smtClean="0"/>
               <a:t>‹#›</a:t>
             </a:fld>
@@ -552,7 +552,7 @@
     </p:spTree>
     <p:extLst>
       <p:ext uri="{BB962C8B-B14F-4D97-AF65-F5344CB8AC3E}">
-        <p14:creationId xmlns:p14="http://schemas.microsoft.com/office/powerpoint/2010/main" val="1529811355"/>
+        <p14:creationId xmlns:p14="http://schemas.microsoft.com/office/powerpoint/2010/main" val="2852801909"/>
       </p:ext>
     </p:extLst>
   </p:cSld>
@@ -584,7 +584,7 @@
           <p:cNvPr id="2" name="縦書きタイトル 1">
             <a:extLst>
               <a:ext uri="{FF2B5EF4-FFF2-40B4-BE49-F238E27FC236}">
-                <a16:creationId xmlns:a16="http://schemas.microsoft.com/office/drawing/2014/main" id="{11A78705-9FF2-9E44-7357-D964F7792A20}"/>
+                <a16:creationId xmlns:a16="http://schemas.microsoft.com/office/drawing/2014/main" id="{9899ABF7-FDD4-C79E-F783-F87151F15A57}"/>
               </a:ext>
             </a:extLst>
           </p:cNvPr>
@@ -617,7 +617,7 @@
           <p:cNvPr id="3" name="縦書きテキスト プレースホルダー 2">
             <a:extLst>
               <a:ext uri="{FF2B5EF4-FFF2-40B4-BE49-F238E27FC236}">
-                <a16:creationId xmlns:a16="http://schemas.microsoft.com/office/drawing/2014/main" id="{24924CF5-F9DC-0250-D8CA-0F0E155E2C0A}"/>
+                <a16:creationId xmlns:a16="http://schemas.microsoft.com/office/drawing/2014/main" id="{D472D596-A702-E36B-1A39-E1CD39D3209B}"/>
               </a:ext>
             </a:extLst>
           </p:cNvPr>
@@ -711,7 +711,7 @@
           <p:cNvPr id="4" name="日付プレースホルダー 3">
             <a:extLst>
               <a:ext uri="{FF2B5EF4-FFF2-40B4-BE49-F238E27FC236}">
-                <a16:creationId xmlns:a16="http://schemas.microsoft.com/office/drawing/2014/main" id="{17985493-ACE2-14F7-C2A6-B998A87563D6}"/>
+                <a16:creationId xmlns:a16="http://schemas.microsoft.com/office/drawing/2014/main" id="{F12D1F23-4A59-18E0-D6DE-C09294B37B81}"/>
               </a:ext>
             </a:extLst>
           </p:cNvPr>
@@ -727,7 +727,7 @@
           <a:bodyPr/>
           <a:lstStyle/>
           <a:p>
-            <a:fld id="{BDF9E524-444D-42E1-A37D-856CCDBEF80D}" type="datetimeFigureOut">
+            <a:fld id="{9E36C393-6375-4B6A-910C-D8F668D1D124}" type="datetimeFigureOut">
               <a:rPr kumimoji="1" lang="ja-JP" altLang="en-US" smtClean="0"/>
               <a:t>2026/7/30</a:t>
             </a:fld>
@@ -740,7 +740,7 @@
           <p:cNvPr id="5" name="フッター プレースホルダー 4">
             <a:extLst>
               <a:ext uri="{FF2B5EF4-FFF2-40B4-BE49-F238E27FC236}">
-                <a16:creationId xmlns:a16="http://schemas.microsoft.com/office/drawing/2014/main" id="{F58B6C54-0B3F-671E-CAB9-93F94EE9BF12}"/>
+                <a16:creationId xmlns:a16="http://schemas.microsoft.com/office/drawing/2014/main" id="{8D840EB6-6019-963C-698E-D8DC5DE0242D}"/>
               </a:ext>
             </a:extLst>
           </p:cNvPr>
@@ -765,7 +765,7 @@
           <p:cNvPr id="6" name="スライド番号プレースホルダー 5">
             <a:extLst>
               <a:ext uri="{FF2B5EF4-FFF2-40B4-BE49-F238E27FC236}">
-                <a16:creationId xmlns:a16="http://schemas.microsoft.com/office/drawing/2014/main" id="{7CB5B27D-0465-54D1-5790-5513D27CAB3A}"/>
+                <a16:creationId xmlns:a16="http://schemas.microsoft.com/office/drawing/2014/main" id="{6ABDC546-244B-14F6-0415-113DBD99B570}"/>
               </a:ext>
             </a:extLst>
           </p:cNvPr>
@@ -781,7 +781,7 @@
           <a:bodyPr/>
           <a:lstStyle/>
           <a:p>
-            <a:fld id="{53568302-EB8F-42C1-853D-02762BEE82E9}" type="slidenum">
+            <a:fld id="{A094DCAC-7CC2-42C0-B2FE-182DD5D9BC28}" type="slidenum">
               <a:rPr kumimoji="1" lang="ja-JP" altLang="en-US" smtClean="0"/>
               <a:t>‹#›</a:t>
             </a:fld>
@@ -792,7 +792,7 @@
     </p:spTree>
     <p:extLst>
       <p:ext uri="{BB962C8B-B14F-4D97-AF65-F5344CB8AC3E}">
-        <p14:creationId xmlns:p14="http://schemas.microsoft.com/office/powerpoint/2010/main" val="1834525223"/>
+        <p14:creationId xmlns:p14="http://schemas.microsoft.com/office/powerpoint/2010/main" val="3949220179"/>
       </p:ext>
     </p:extLst>
   </p:cSld>
@@ -824,7 +824,7 @@
           <p:cNvPr id="2" name="タイトル 1">
             <a:extLst>
               <a:ext uri="{FF2B5EF4-FFF2-40B4-BE49-F238E27FC236}">
-                <a16:creationId xmlns:a16="http://schemas.microsoft.com/office/drawing/2014/main" id="{2759C820-4EC6-E34B-92AF-33D23599DBB6}"/>
+                <a16:creationId xmlns:a16="http://schemas.microsoft.com/office/drawing/2014/main" id="{5B09DD34-2C3F-1C43-E64D-BA7BBB6CBCE9}"/>
               </a:ext>
             </a:extLst>
           </p:cNvPr>
@@ -852,7 +852,7 @@
           <p:cNvPr id="3" name="コンテンツ プレースホルダー 2">
             <a:extLst>
               <a:ext uri="{FF2B5EF4-FFF2-40B4-BE49-F238E27FC236}">
-                <a16:creationId xmlns:a16="http://schemas.microsoft.com/office/drawing/2014/main" id="{23DC3DF2-7183-3DF9-FC3F-16F15BE6FC2D}"/>
+                <a16:creationId xmlns:a16="http://schemas.microsoft.com/office/drawing/2014/main" id="{9CF024E6-083B-C1D3-4076-490383CDFBB4}"/>
               </a:ext>
             </a:extLst>
           </p:cNvPr>
@@ -941,7 +941,7 @@
           <p:cNvPr id="4" name="日付プレースホルダー 3">
             <a:extLst>
               <a:ext uri="{FF2B5EF4-FFF2-40B4-BE49-F238E27FC236}">
-                <a16:creationId xmlns:a16="http://schemas.microsoft.com/office/drawing/2014/main" id="{C27A1DF6-0498-B0D4-DA11-727C979B0813}"/>
+                <a16:creationId xmlns:a16="http://schemas.microsoft.com/office/drawing/2014/main" id="{20185AFD-C545-0C34-10C3-4E290C525A9F}"/>
               </a:ext>
             </a:extLst>
           </p:cNvPr>
@@ -957,7 +957,7 @@
           <a:bodyPr/>
           <a:lstStyle/>
           <a:p>
-            <a:fld id="{BDF9E524-444D-42E1-A37D-856CCDBEF80D}" type="datetimeFigureOut">
+            <a:fld id="{9E36C393-6375-4B6A-910C-D8F668D1D124}" type="datetimeFigureOut">
               <a:rPr kumimoji="1" lang="ja-JP" altLang="en-US" smtClean="0"/>
               <a:t>2026/7/30</a:t>
             </a:fld>
@@ -970,7 +970,7 @@
           <p:cNvPr id="5" name="フッター プレースホルダー 4">
             <a:extLst>
               <a:ext uri="{FF2B5EF4-FFF2-40B4-BE49-F238E27FC236}">
-                <a16:creationId xmlns:a16="http://schemas.microsoft.com/office/drawing/2014/main" id="{E8676FA7-E885-B1F8-DB04-E69EB79B3361}"/>
+                <a16:creationId xmlns:a16="http://schemas.microsoft.com/office/drawing/2014/main" id="{A96FFD93-C14E-943D-AEA8-244C6DA66B8B}"/>
               </a:ext>
             </a:extLst>
           </p:cNvPr>
@@ -995,7 +995,7 @@
           <p:cNvPr id="6" name="スライド番号プレースホルダー 5">
             <a:extLst>
               <a:ext uri="{FF2B5EF4-FFF2-40B4-BE49-F238E27FC236}">
-                <a16:creationId xmlns:a16="http://schemas.microsoft.com/office/drawing/2014/main" id="{75AA65E5-9D70-BE72-ED9A-D3952ABAB449}"/>
+                <a16:creationId xmlns:a16="http://schemas.microsoft.com/office/drawing/2014/main" id="{7FE49B31-4D34-D527-F2C0-2ED0B2D1A3F6}"/>
               </a:ext>
             </a:extLst>
           </p:cNvPr>
@@ -1011,7 +1011,7 @@
           <a:bodyPr/>
           <a:lstStyle/>
           <a:p>
-            <a:fld id="{53568302-EB8F-42C1-853D-02762BEE82E9}" type="slidenum">
+            <a:fld id="{A094DCAC-7CC2-42C0-B2FE-182DD5D9BC28}" type="slidenum">
               <a:rPr kumimoji="1" lang="ja-JP" altLang="en-US" smtClean="0"/>
               <a:t>‹#›</a:t>
             </a:fld>
@@ -1022,7 +1022,7 @@
     </p:spTree>
     <p:extLst>
       <p:ext uri="{BB962C8B-B14F-4D97-AF65-F5344CB8AC3E}">
-        <p14:creationId xmlns:p14="http://schemas.microsoft.com/office/powerpoint/2010/main" val="3973046418"/>
+        <p14:creationId xmlns:p14="http://schemas.microsoft.com/office/powerpoint/2010/main" val="2230134264"/>
       </p:ext>
     </p:extLst>
   </p:cSld>
@@ -1054,7 +1054,7 @@
           <p:cNvPr id="2" name="タイトル 1">
             <a:extLst>
               <a:ext uri="{FF2B5EF4-FFF2-40B4-BE49-F238E27FC236}">
-                <a16:creationId xmlns:a16="http://schemas.microsoft.com/office/drawing/2014/main" id="{B3A5485A-EE40-AEB3-1720-1DE154ED0CDD}"/>
+                <a16:creationId xmlns:a16="http://schemas.microsoft.com/office/drawing/2014/main" id="{D8496B0E-E7EF-B106-934F-2DC3F1C0F183}"/>
               </a:ext>
             </a:extLst>
           </p:cNvPr>
@@ -1091,7 +1091,7 @@
           <p:cNvPr id="3" name="テキスト プレースホルダー 2">
             <a:extLst>
               <a:ext uri="{FF2B5EF4-FFF2-40B4-BE49-F238E27FC236}">
-                <a16:creationId xmlns:a16="http://schemas.microsoft.com/office/drawing/2014/main" id="{443A0BCF-B9D1-B9AA-561A-3EA7EDA855C1}"/>
+                <a16:creationId xmlns:a16="http://schemas.microsoft.com/office/drawing/2014/main" id="{2A29F4AE-7432-30B0-350D-1DF679AE747E}"/>
               </a:ext>
             </a:extLst>
           </p:cNvPr>
@@ -1216,7 +1216,7 @@
           <p:cNvPr id="4" name="日付プレースホルダー 3">
             <a:extLst>
               <a:ext uri="{FF2B5EF4-FFF2-40B4-BE49-F238E27FC236}">
-                <a16:creationId xmlns:a16="http://schemas.microsoft.com/office/drawing/2014/main" id="{792BAED0-0C7A-F4B1-E977-C3D0DF53182E}"/>
+                <a16:creationId xmlns:a16="http://schemas.microsoft.com/office/drawing/2014/main" id="{1A033A4B-9DE8-A8CF-BDED-DCD8A916AE39}"/>
               </a:ext>
             </a:extLst>
           </p:cNvPr>
@@ -1232,7 +1232,7 @@
           <a:bodyPr/>
           <a:lstStyle/>
           <a:p>
-            <a:fld id="{BDF9E524-444D-42E1-A37D-856CCDBEF80D}" type="datetimeFigureOut">
+            <a:fld id="{9E36C393-6375-4B6A-910C-D8F668D1D124}" type="datetimeFigureOut">
               <a:rPr kumimoji="1" lang="ja-JP" altLang="en-US" smtClean="0"/>
               <a:t>2026/7/30</a:t>
             </a:fld>
@@ -1245,7 +1245,7 @@
           <p:cNvPr id="5" name="フッター プレースホルダー 4">
             <a:extLst>
               <a:ext uri="{FF2B5EF4-FFF2-40B4-BE49-F238E27FC236}">
-                <a16:creationId xmlns:a16="http://schemas.microsoft.com/office/drawing/2014/main" id="{96E0F99F-3DF4-18A1-081F-43A440A614EA}"/>
+                <a16:creationId xmlns:a16="http://schemas.microsoft.com/office/drawing/2014/main" id="{AD1876AF-962A-0B0A-9466-0F8B6769D85F}"/>
               </a:ext>
             </a:extLst>
           </p:cNvPr>
@@ -1270,7 +1270,7 @@
           <p:cNvPr id="6" name="スライド番号プレースホルダー 5">
             <a:extLst>
               <a:ext uri="{FF2B5EF4-FFF2-40B4-BE49-F238E27FC236}">
-                <a16:creationId xmlns:a16="http://schemas.microsoft.com/office/drawing/2014/main" id="{236CA86D-0EBF-0F0F-210C-DCD58715A116}"/>
+                <a16:creationId xmlns:a16="http://schemas.microsoft.com/office/drawing/2014/main" id="{1A7079A3-0088-8C3B-EEFD-A7D935870FD1}"/>
               </a:ext>
             </a:extLst>
           </p:cNvPr>
@@ -1286,7 +1286,7 @@
           <a:bodyPr/>
           <a:lstStyle/>
           <a:p>
-            <a:fld id="{53568302-EB8F-42C1-853D-02762BEE82E9}" type="slidenum">
+            <a:fld id="{A094DCAC-7CC2-42C0-B2FE-182DD5D9BC28}" type="slidenum">
               <a:rPr kumimoji="1" lang="ja-JP" altLang="en-US" smtClean="0"/>
               <a:t>‹#›</a:t>
             </a:fld>
@@ -1297,7 +1297,7 @@
     </p:spTree>
     <p:extLst>
       <p:ext uri="{BB962C8B-B14F-4D97-AF65-F5344CB8AC3E}">
-        <p14:creationId xmlns:p14="http://schemas.microsoft.com/office/powerpoint/2010/main" val="882301743"/>
+        <p14:creationId xmlns:p14="http://schemas.microsoft.com/office/powerpoint/2010/main" val="890123715"/>
       </p:ext>
     </p:extLst>
   </p:cSld>
@@ -1329,7 +1329,7 @@
           <p:cNvPr id="2" name="タイトル 1">
             <a:extLst>
               <a:ext uri="{FF2B5EF4-FFF2-40B4-BE49-F238E27FC236}">
-                <a16:creationId xmlns:a16="http://schemas.microsoft.com/office/drawing/2014/main" id="{4C9F0DA0-1C82-7C32-58F7-98FE4546D828}"/>
+                <a16:creationId xmlns:a16="http://schemas.microsoft.com/office/drawing/2014/main" id="{EEC39289-E2B8-DA91-85BE-BB56F80E3516}"/>
               </a:ext>
             </a:extLst>
           </p:cNvPr>
@@ -1357,7 +1357,7 @@
           <p:cNvPr id="3" name="コンテンツ プレースホルダー 2">
             <a:extLst>
               <a:ext uri="{FF2B5EF4-FFF2-40B4-BE49-F238E27FC236}">
-                <a16:creationId xmlns:a16="http://schemas.microsoft.com/office/drawing/2014/main" id="{686364D4-773A-AF4B-331C-E27D26A6AE1D}"/>
+                <a16:creationId xmlns:a16="http://schemas.microsoft.com/office/drawing/2014/main" id="{6A86F4C2-4387-C40C-0F0A-21DB070FF24A}"/>
               </a:ext>
             </a:extLst>
           </p:cNvPr>
@@ -1451,7 +1451,7 @@
           <p:cNvPr id="4" name="コンテンツ プレースホルダー 3">
             <a:extLst>
               <a:ext uri="{FF2B5EF4-FFF2-40B4-BE49-F238E27FC236}">
-                <a16:creationId xmlns:a16="http://schemas.microsoft.com/office/drawing/2014/main" id="{56909719-03C0-232F-926E-C878331411EA}"/>
+                <a16:creationId xmlns:a16="http://schemas.microsoft.com/office/drawing/2014/main" id="{50DB8FDA-F2CA-E946-5B84-2DD011003D85}"/>
               </a:ext>
             </a:extLst>
           </p:cNvPr>
@@ -1545,7 +1545,7 @@
           <p:cNvPr id="5" name="日付プレースホルダー 4">
             <a:extLst>
               <a:ext uri="{FF2B5EF4-FFF2-40B4-BE49-F238E27FC236}">
-                <a16:creationId xmlns:a16="http://schemas.microsoft.com/office/drawing/2014/main" id="{7E48F47E-326E-9404-9290-60D38262DEE0}"/>
+                <a16:creationId xmlns:a16="http://schemas.microsoft.com/office/drawing/2014/main" id="{5BD07402-CF58-D777-FA14-54ED2B13A355}"/>
               </a:ext>
             </a:extLst>
           </p:cNvPr>
@@ -1561,7 +1561,7 @@
           <a:bodyPr/>
           <a:lstStyle/>
           <a:p>
-            <a:fld id="{BDF9E524-444D-42E1-A37D-856CCDBEF80D}" type="datetimeFigureOut">
+            <a:fld id="{9E36C393-6375-4B6A-910C-D8F668D1D124}" type="datetimeFigureOut">
               <a:rPr kumimoji="1" lang="ja-JP" altLang="en-US" smtClean="0"/>
               <a:t>2026/7/30</a:t>
             </a:fld>
@@ -1574,7 +1574,7 @@
           <p:cNvPr id="6" name="フッター プレースホルダー 5">
             <a:extLst>
               <a:ext uri="{FF2B5EF4-FFF2-40B4-BE49-F238E27FC236}">
-                <a16:creationId xmlns:a16="http://schemas.microsoft.com/office/drawing/2014/main" id="{487CF336-2592-390B-8C4B-257B674A826B}"/>
+                <a16:creationId xmlns:a16="http://schemas.microsoft.com/office/drawing/2014/main" id="{075E48F3-E92D-1900-1787-9FBB9D875A04}"/>
               </a:ext>
             </a:extLst>
           </p:cNvPr>
@@ -1599,7 +1599,7 @@
           <p:cNvPr id="7" name="スライド番号プレースホルダー 6">
             <a:extLst>
               <a:ext uri="{FF2B5EF4-FFF2-40B4-BE49-F238E27FC236}">
-                <a16:creationId xmlns:a16="http://schemas.microsoft.com/office/drawing/2014/main" id="{0C7EA07C-2B97-EFD3-E119-B48E53907B4E}"/>
+                <a16:creationId xmlns:a16="http://schemas.microsoft.com/office/drawing/2014/main" id="{2B034988-6238-138F-8F51-C74F2D062D08}"/>
               </a:ext>
             </a:extLst>
           </p:cNvPr>
@@ -1615,7 +1615,7 @@
           <a:bodyPr/>
           <a:lstStyle/>
           <a:p>
-            <a:fld id="{53568302-EB8F-42C1-853D-02762BEE82E9}" type="slidenum">
+            <a:fld id="{A094DCAC-7CC2-42C0-B2FE-182DD5D9BC28}" type="slidenum">
               <a:rPr kumimoji="1" lang="ja-JP" altLang="en-US" smtClean="0"/>
               <a:t>‹#›</a:t>
             </a:fld>
@@ -1626,7 +1626,7 @@
     </p:spTree>
     <p:extLst>
       <p:ext uri="{BB962C8B-B14F-4D97-AF65-F5344CB8AC3E}">
-        <p14:creationId xmlns:p14="http://schemas.microsoft.com/office/powerpoint/2010/main" val="3730819828"/>
+        <p14:creationId xmlns:p14="http://schemas.microsoft.com/office/powerpoint/2010/main" val="912153369"/>
       </p:ext>
     </p:extLst>
   </p:cSld>
@@ -1658,7 +1658,7 @@
           <p:cNvPr id="2" name="タイトル 1">
             <a:extLst>
               <a:ext uri="{FF2B5EF4-FFF2-40B4-BE49-F238E27FC236}">
-                <a16:creationId xmlns:a16="http://schemas.microsoft.com/office/drawing/2014/main" id="{6B7C073F-7F5E-4123-D20B-09C7316CFBC1}"/>
+                <a16:creationId xmlns:a16="http://schemas.microsoft.com/office/drawing/2014/main" id="{231334B1-072D-038A-3377-F50CA7FA4366}"/>
               </a:ext>
             </a:extLst>
           </p:cNvPr>
@@ -1691,7 +1691,7 @@
           <p:cNvPr id="3" name="テキスト プレースホルダー 2">
             <a:extLst>
               <a:ext uri="{FF2B5EF4-FFF2-40B4-BE49-F238E27FC236}">
-                <a16:creationId xmlns:a16="http://schemas.microsoft.com/office/drawing/2014/main" id="{3C61D8F3-E752-4EFB-C7A7-B3AB28A6F11B}"/>
+                <a16:creationId xmlns:a16="http://schemas.microsoft.com/office/drawing/2014/main" id="{CD9AD055-1857-A4F9-039D-293BA3A34B7B}"/>
               </a:ext>
             </a:extLst>
           </p:cNvPr>
@@ -1762,7 +1762,7 @@
           <p:cNvPr id="4" name="コンテンツ プレースホルダー 3">
             <a:extLst>
               <a:ext uri="{FF2B5EF4-FFF2-40B4-BE49-F238E27FC236}">
-                <a16:creationId xmlns:a16="http://schemas.microsoft.com/office/drawing/2014/main" id="{B22FCBEE-25AE-2DAE-3A0B-3300D9CAA66B}"/>
+                <a16:creationId xmlns:a16="http://schemas.microsoft.com/office/drawing/2014/main" id="{2FBB3EE1-38D9-DD7B-D223-4B59B5F7B1E0}"/>
               </a:ext>
             </a:extLst>
           </p:cNvPr>
@@ -1856,7 +1856,7 @@
           <p:cNvPr id="5" name="テキスト プレースホルダー 4">
             <a:extLst>
               <a:ext uri="{FF2B5EF4-FFF2-40B4-BE49-F238E27FC236}">
-                <a16:creationId xmlns:a16="http://schemas.microsoft.com/office/drawing/2014/main" id="{91569E2C-FEB8-821B-BD34-13101D947196}"/>
+                <a16:creationId xmlns:a16="http://schemas.microsoft.com/office/drawing/2014/main" id="{E58E8A44-E4AA-ED11-079C-4AF7AFDE9498}"/>
               </a:ext>
             </a:extLst>
           </p:cNvPr>
@@ -1927,7 +1927,7 @@
           <p:cNvPr id="6" name="コンテンツ プレースホルダー 5">
             <a:extLst>
               <a:ext uri="{FF2B5EF4-FFF2-40B4-BE49-F238E27FC236}">
-                <a16:creationId xmlns:a16="http://schemas.microsoft.com/office/drawing/2014/main" id="{C96F251E-F66E-5AAB-1C51-AAAE3FCE6508}"/>
+                <a16:creationId xmlns:a16="http://schemas.microsoft.com/office/drawing/2014/main" id="{7A9A014A-7454-F19C-F798-F0092581A656}"/>
               </a:ext>
             </a:extLst>
           </p:cNvPr>
@@ -2021,7 +2021,7 @@
           <p:cNvPr id="7" name="日付プレースホルダー 6">
             <a:extLst>
               <a:ext uri="{FF2B5EF4-FFF2-40B4-BE49-F238E27FC236}">
-                <a16:creationId xmlns:a16="http://schemas.microsoft.com/office/drawing/2014/main" id="{2F68009A-6527-6BA4-B57E-E58F95EC6B8B}"/>
+                <a16:creationId xmlns:a16="http://schemas.microsoft.com/office/drawing/2014/main" id="{BB506F26-2C27-A8A2-67CC-3CA264310952}"/>
               </a:ext>
             </a:extLst>
           </p:cNvPr>
@@ -2037,7 +2037,7 @@
           <a:bodyPr/>
           <a:lstStyle/>
           <a:p>
-            <a:fld id="{BDF9E524-444D-42E1-A37D-856CCDBEF80D}" type="datetimeFigureOut">
+            <a:fld id="{9E36C393-6375-4B6A-910C-D8F668D1D124}" type="datetimeFigureOut">
               <a:rPr kumimoji="1" lang="ja-JP" altLang="en-US" smtClean="0"/>
               <a:t>2026/7/30</a:t>
             </a:fld>
@@ -2050,7 +2050,7 @@
           <p:cNvPr id="8" name="フッター プレースホルダー 7">
             <a:extLst>
               <a:ext uri="{FF2B5EF4-FFF2-40B4-BE49-F238E27FC236}">
-                <a16:creationId xmlns:a16="http://schemas.microsoft.com/office/drawing/2014/main" id="{F7876F00-2D19-1783-DAE0-565D947929EC}"/>
+                <a16:creationId xmlns:a16="http://schemas.microsoft.com/office/drawing/2014/main" id="{33FF4FB8-2ACE-6A2E-56B4-57D4218A852B}"/>
               </a:ext>
             </a:extLst>
           </p:cNvPr>
@@ -2075,7 +2075,7 @@
           <p:cNvPr id="9" name="スライド番号プレースホルダー 8">
             <a:extLst>
               <a:ext uri="{FF2B5EF4-FFF2-40B4-BE49-F238E27FC236}">
-                <a16:creationId xmlns:a16="http://schemas.microsoft.com/office/drawing/2014/main" id="{768E9223-BC56-A1F0-E7F5-1089FD6816F0}"/>
+                <a16:creationId xmlns:a16="http://schemas.microsoft.com/office/drawing/2014/main" id="{79B66300-8F47-37C8-9FD7-35296966F4AD}"/>
               </a:ext>
             </a:extLst>
           </p:cNvPr>
@@ -2091,7 +2091,7 @@
           <a:bodyPr/>
           <a:lstStyle/>
           <a:p>
-            <a:fld id="{53568302-EB8F-42C1-853D-02762BEE82E9}" type="slidenum">
+            <a:fld id="{A094DCAC-7CC2-42C0-B2FE-182DD5D9BC28}" type="slidenum">
               <a:rPr kumimoji="1" lang="ja-JP" altLang="en-US" smtClean="0"/>
               <a:t>‹#›</a:t>
             </a:fld>
@@ -2102,7 +2102,7 @@
     </p:spTree>
     <p:extLst>
       <p:ext uri="{BB962C8B-B14F-4D97-AF65-F5344CB8AC3E}">
-        <p14:creationId xmlns:p14="http://schemas.microsoft.com/office/powerpoint/2010/main" val="3643086920"/>
+        <p14:creationId xmlns:p14="http://schemas.microsoft.com/office/powerpoint/2010/main" val="1017333231"/>
       </p:ext>
     </p:extLst>
   </p:cSld>
@@ -2134,7 +2134,7 @@
           <p:cNvPr id="2" name="タイトル 1">
             <a:extLst>
               <a:ext uri="{FF2B5EF4-FFF2-40B4-BE49-F238E27FC236}">
-                <a16:creationId xmlns:a16="http://schemas.microsoft.com/office/drawing/2014/main" id="{71F37E1A-A30E-F3F1-68CD-D9B99280ED1D}"/>
+                <a16:creationId xmlns:a16="http://schemas.microsoft.com/office/drawing/2014/main" id="{0A7A78C4-7C16-7BC6-1FE6-21D2B8A8521B}"/>
               </a:ext>
             </a:extLst>
           </p:cNvPr>
@@ -2162,7 +2162,7 @@
           <p:cNvPr id="3" name="日付プレースホルダー 2">
             <a:extLst>
               <a:ext uri="{FF2B5EF4-FFF2-40B4-BE49-F238E27FC236}">
-                <a16:creationId xmlns:a16="http://schemas.microsoft.com/office/drawing/2014/main" id="{83EDB11D-2E06-7009-AA8F-87131F4D2D65}"/>
+                <a16:creationId xmlns:a16="http://schemas.microsoft.com/office/drawing/2014/main" id="{28DF3109-D4E8-1E92-66D1-FCAA5CCD0514}"/>
               </a:ext>
             </a:extLst>
           </p:cNvPr>
@@ -2178,7 +2178,7 @@
           <a:bodyPr/>
           <a:lstStyle/>
           <a:p>
-            <a:fld id="{BDF9E524-444D-42E1-A37D-856CCDBEF80D}" type="datetimeFigureOut">
+            <a:fld id="{9E36C393-6375-4B6A-910C-D8F668D1D124}" type="datetimeFigureOut">
               <a:rPr kumimoji="1" lang="ja-JP" altLang="en-US" smtClean="0"/>
               <a:t>2026/7/30</a:t>
             </a:fld>
@@ -2191,7 +2191,7 @@
           <p:cNvPr id="4" name="フッター プレースホルダー 3">
             <a:extLst>
               <a:ext uri="{FF2B5EF4-FFF2-40B4-BE49-F238E27FC236}">
-                <a16:creationId xmlns:a16="http://schemas.microsoft.com/office/drawing/2014/main" id="{69E1FD7C-1E07-C154-E6C9-12D2A6EAE243}"/>
+                <a16:creationId xmlns:a16="http://schemas.microsoft.com/office/drawing/2014/main" id="{7C868BC4-1B13-1F62-36BA-28A9239C7800}"/>
               </a:ext>
             </a:extLst>
           </p:cNvPr>
@@ -2216,7 +2216,7 @@
           <p:cNvPr id="5" name="スライド番号プレースホルダー 4">
             <a:extLst>
               <a:ext uri="{FF2B5EF4-FFF2-40B4-BE49-F238E27FC236}">
-                <a16:creationId xmlns:a16="http://schemas.microsoft.com/office/drawing/2014/main" id="{A8C65AEA-AC49-D019-3C82-43D3C7419A35}"/>
+                <a16:creationId xmlns:a16="http://schemas.microsoft.com/office/drawing/2014/main" id="{9DFA5B70-1895-B15C-3BF2-29E8C0D7D8C8}"/>
               </a:ext>
             </a:extLst>
           </p:cNvPr>
@@ -2232,7 +2232,7 @@
           <a:bodyPr/>
           <a:lstStyle/>
           <a:p>
-            <a:fld id="{53568302-EB8F-42C1-853D-02762BEE82E9}" type="slidenum">
+            <a:fld id="{A094DCAC-7CC2-42C0-B2FE-182DD5D9BC28}" type="slidenum">
               <a:rPr kumimoji="1" lang="ja-JP" altLang="en-US" smtClean="0"/>
               <a:t>‹#›</a:t>
             </a:fld>
@@ -2243,7 +2243,7 @@
     </p:spTree>
     <p:extLst>
       <p:ext uri="{BB962C8B-B14F-4D97-AF65-F5344CB8AC3E}">
-        <p14:creationId xmlns:p14="http://schemas.microsoft.com/office/powerpoint/2010/main" val="1151025500"/>
+        <p14:creationId xmlns:p14="http://schemas.microsoft.com/office/powerpoint/2010/main" val="2670851238"/>
       </p:ext>
     </p:extLst>
   </p:cSld>
@@ -2275,7 +2275,7 @@
           <p:cNvPr id="2" name="日付プレースホルダー 1">
             <a:extLst>
               <a:ext uri="{FF2B5EF4-FFF2-40B4-BE49-F238E27FC236}">
-                <a16:creationId xmlns:a16="http://schemas.microsoft.com/office/drawing/2014/main" id="{ACD62ECD-B18A-4A41-A02D-CC83A2C3A735}"/>
+                <a16:creationId xmlns:a16="http://schemas.microsoft.com/office/drawing/2014/main" id="{66DE1E2E-66EB-4F36-C9FD-C67040D5D416}"/>
               </a:ext>
             </a:extLst>
           </p:cNvPr>
@@ -2291,7 +2291,7 @@
           <a:bodyPr/>
           <a:lstStyle/>
           <a:p>
-            <a:fld id="{BDF9E524-444D-42E1-A37D-856CCDBEF80D}" type="datetimeFigureOut">
+            <a:fld id="{9E36C393-6375-4B6A-910C-D8F668D1D124}" type="datetimeFigureOut">
               <a:rPr kumimoji="1" lang="ja-JP" altLang="en-US" smtClean="0"/>
               <a:t>2026/7/30</a:t>
             </a:fld>
@@ -2304,7 +2304,7 @@
           <p:cNvPr id="3" name="フッター プレースホルダー 2">
             <a:extLst>
               <a:ext uri="{FF2B5EF4-FFF2-40B4-BE49-F238E27FC236}">
-                <a16:creationId xmlns:a16="http://schemas.microsoft.com/office/drawing/2014/main" id="{CEEDBD7A-FDEF-8242-0942-8CC3BFE86F37}"/>
+                <a16:creationId xmlns:a16="http://schemas.microsoft.com/office/drawing/2014/main" id="{4DE1DDD5-0785-94CC-91F8-CD20C3EEF94B}"/>
               </a:ext>
             </a:extLst>
           </p:cNvPr>
@@ -2329,7 +2329,7 @@
           <p:cNvPr id="4" name="スライド番号プレースホルダー 3">
             <a:extLst>
               <a:ext uri="{FF2B5EF4-FFF2-40B4-BE49-F238E27FC236}">
-                <a16:creationId xmlns:a16="http://schemas.microsoft.com/office/drawing/2014/main" id="{85D82A5A-2DD5-82C6-CDAB-0BE71AB6E0FF}"/>
+                <a16:creationId xmlns:a16="http://schemas.microsoft.com/office/drawing/2014/main" id="{B5C04AA6-4D0B-4F82-5D02-D79A5DC11FAD}"/>
               </a:ext>
             </a:extLst>
           </p:cNvPr>
@@ -2345,7 +2345,7 @@
           <a:bodyPr/>
           <a:lstStyle/>
           <a:p>
-            <a:fld id="{53568302-EB8F-42C1-853D-02762BEE82E9}" type="slidenum">
+            <a:fld id="{A094DCAC-7CC2-42C0-B2FE-182DD5D9BC28}" type="slidenum">
               <a:rPr kumimoji="1" lang="ja-JP" altLang="en-US" smtClean="0"/>
               <a:t>‹#›</a:t>
             </a:fld>
@@ -2356,7 +2356,7 @@
     </p:spTree>
     <p:extLst>
       <p:ext uri="{BB962C8B-B14F-4D97-AF65-F5344CB8AC3E}">
-        <p14:creationId xmlns:p14="http://schemas.microsoft.com/office/powerpoint/2010/main" val="1873720595"/>
+        <p14:creationId xmlns:p14="http://schemas.microsoft.com/office/powerpoint/2010/main" val="1161928875"/>
       </p:ext>
     </p:extLst>
   </p:cSld>
@@ -2388,7 +2388,7 @@
           <p:cNvPr id="2" name="タイトル 1">
             <a:extLst>
               <a:ext uri="{FF2B5EF4-FFF2-40B4-BE49-F238E27FC236}">
-                <a16:creationId xmlns:a16="http://schemas.microsoft.com/office/drawing/2014/main" id="{9775D77A-AB8B-6891-FDC5-F9081BFF1D0A}"/>
+                <a16:creationId xmlns:a16="http://schemas.microsoft.com/office/drawing/2014/main" id="{21E04A54-BD26-FCEB-BADF-0B9682D529A0}"/>
               </a:ext>
             </a:extLst>
           </p:cNvPr>
@@ -2425,7 +2425,7 @@
           <p:cNvPr id="3" name="コンテンツ プレースホルダー 2">
             <a:extLst>
               <a:ext uri="{FF2B5EF4-FFF2-40B4-BE49-F238E27FC236}">
-                <a16:creationId xmlns:a16="http://schemas.microsoft.com/office/drawing/2014/main" id="{5724DEBB-7020-9236-DBDB-AC8197858B1F}"/>
+                <a16:creationId xmlns:a16="http://schemas.microsoft.com/office/drawing/2014/main" id="{9A3E65AC-2D18-FC2C-8D64-3E23C851A3D9}"/>
               </a:ext>
             </a:extLst>
           </p:cNvPr>
@@ -2547,7 +2547,7 @@
           <p:cNvPr id="4" name="テキスト プレースホルダー 3">
             <a:extLst>
               <a:ext uri="{FF2B5EF4-FFF2-40B4-BE49-F238E27FC236}">
-                <a16:creationId xmlns:a16="http://schemas.microsoft.com/office/drawing/2014/main" id="{0993EAD9-7E9E-0A23-C728-FC1B1A54CEA9}"/>
+                <a16:creationId xmlns:a16="http://schemas.microsoft.com/office/drawing/2014/main" id="{1D40610C-F707-FD83-BB66-F69796ED08FE}"/>
               </a:ext>
             </a:extLst>
           </p:cNvPr>
@@ -2618,7 +2618,7 @@
           <p:cNvPr id="5" name="日付プレースホルダー 4">
             <a:extLst>
               <a:ext uri="{FF2B5EF4-FFF2-40B4-BE49-F238E27FC236}">
-                <a16:creationId xmlns:a16="http://schemas.microsoft.com/office/drawing/2014/main" id="{170D53C5-2535-1459-5EAE-0819D0158933}"/>
+                <a16:creationId xmlns:a16="http://schemas.microsoft.com/office/drawing/2014/main" id="{E36A8C93-2DB3-19F2-90EE-EB7CC0AABD5E}"/>
               </a:ext>
             </a:extLst>
           </p:cNvPr>
@@ -2634,7 +2634,7 @@
           <a:bodyPr/>
           <a:lstStyle/>
           <a:p>
-            <a:fld id="{BDF9E524-444D-42E1-A37D-856CCDBEF80D}" type="datetimeFigureOut">
+            <a:fld id="{9E36C393-6375-4B6A-910C-D8F668D1D124}" type="datetimeFigureOut">
               <a:rPr kumimoji="1" lang="ja-JP" altLang="en-US" smtClean="0"/>
               <a:t>2026/7/30</a:t>
             </a:fld>
@@ -2647,7 +2647,7 @@
           <p:cNvPr id="6" name="フッター プレースホルダー 5">
             <a:extLst>
               <a:ext uri="{FF2B5EF4-FFF2-40B4-BE49-F238E27FC236}">
-                <a16:creationId xmlns:a16="http://schemas.microsoft.com/office/drawing/2014/main" id="{34758C7B-C5F9-279F-5D9E-0F4BA097C14E}"/>
+                <a16:creationId xmlns:a16="http://schemas.microsoft.com/office/drawing/2014/main" id="{97613E98-3B6F-A0FD-5ABA-5444CA09E79F}"/>
               </a:ext>
             </a:extLst>
           </p:cNvPr>
@@ -2672,7 +2672,7 @@
           <p:cNvPr id="7" name="スライド番号プレースホルダー 6">
             <a:extLst>
               <a:ext uri="{FF2B5EF4-FFF2-40B4-BE49-F238E27FC236}">
-                <a16:creationId xmlns:a16="http://schemas.microsoft.com/office/drawing/2014/main" id="{A7E1F58F-2391-2F5F-CE78-2AD66BEF5A05}"/>
+                <a16:creationId xmlns:a16="http://schemas.microsoft.com/office/drawing/2014/main" id="{1094868B-1AC6-A66D-E0BC-D21145D4AE4F}"/>
               </a:ext>
             </a:extLst>
           </p:cNvPr>
@@ -2688,7 +2688,7 @@
           <a:bodyPr/>
           <a:lstStyle/>
           <a:p>
-            <a:fld id="{53568302-EB8F-42C1-853D-02762BEE82E9}" type="slidenum">
+            <a:fld id="{A094DCAC-7CC2-42C0-B2FE-182DD5D9BC28}" type="slidenum">
               <a:rPr kumimoji="1" lang="ja-JP" altLang="en-US" smtClean="0"/>
               <a:t>‹#›</a:t>
             </a:fld>
@@ -2699,7 +2699,7 @@
     </p:spTree>
     <p:extLst>
       <p:ext uri="{BB962C8B-B14F-4D97-AF65-F5344CB8AC3E}">
-        <p14:creationId xmlns:p14="http://schemas.microsoft.com/office/powerpoint/2010/main" val="3774147424"/>
+        <p14:creationId xmlns:p14="http://schemas.microsoft.com/office/powerpoint/2010/main" val="4058396577"/>
       </p:ext>
     </p:extLst>
   </p:cSld>
@@ -2731,7 +2731,7 @@
           <p:cNvPr id="2" name="タイトル 1">
             <a:extLst>
               <a:ext uri="{FF2B5EF4-FFF2-40B4-BE49-F238E27FC236}">
-                <a16:creationId xmlns:a16="http://schemas.microsoft.com/office/drawing/2014/main" id="{57F8FA59-7031-0B1F-DBEF-519C9256A6A6}"/>
+                <a16:creationId xmlns:a16="http://schemas.microsoft.com/office/drawing/2014/main" id="{A26BAE63-389A-953F-2193-839272122E1C}"/>
               </a:ext>
             </a:extLst>
           </p:cNvPr>
@@ -2768,7 +2768,7 @@
           <p:cNvPr id="3" name="図プレースホルダー 2">
             <a:extLst>
               <a:ext uri="{FF2B5EF4-FFF2-40B4-BE49-F238E27FC236}">
-                <a16:creationId xmlns:a16="http://schemas.microsoft.com/office/drawing/2014/main" id="{7C635E5C-F572-2560-A51A-A0A446506AE6}"/>
+                <a16:creationId xmlns:a16="http://schemas.microsoft.com/office/drawing/2014/main" id="{8110F83E-75DB-B46B-7FF7-7CF854CAA8C8}"/>
               </a:ext>
             </a:extLst>
           </p:cNvPr>
@@ -2835,7 +2835,7 @@
           <p:cNvPr id="4" name="テキスト プレースホルダー 3">
             <a:extLst>
               <a:ext uri="{FF2B5EF4-FFF2-40B4-BE49-F238E27FC236}">
-                <a16:creationId xmlns:a16="http://schemas.microsoft.com/office/drawing/2014/main" id="{37864F78-4988-8EA4-82A7-689E868CFFF5}"/>
+                <a16:creationId xmlns:a16="http://schemas.microsoft.com/office/drawing/2014/main" id="{340177D4-1E60-03B2-3869-737CF72109AF}"/>
               </a:ext>
             </a:extLst>
           </p:cNvPr>
@@ -2906,7 +2906,7 @@
           <p:cNvPr id="5" name="日付プレースホルダー 4">
             <a:extLst>
               <a:ext uri="{FF2B5EF4-FFF2-40B4-BE49-F238E27FC236}">
-                <a16:creationId xmlns:a16="http://schemas.microsoft.com/office/drawing/2014/main" id="{2CB0A646-97EA-D700-3BC1-18AEBDF7CC9E}"/>
+                <a16:creationId xmlns:a16="http://schemas.microsoft.com/office/drawing/2014/main" id="{BA12DA3B-7533-F45D-7797-544F2FF866ED}"/>
               </a:ext>
             </a:extLst>
           </p:cNvPr>
@@ -2922,7 +2922,7 @@
           <a:bodyPr/>
           <a:lstStyle/>
           <a:p>
-            <a:fld id="{BDF9E524-444D-42E1-A37D-856CCDBEF80D}" type="datetimeFigureOut">
+            <a:fld id="{9E36C393-6375-4B6A-910C-D8F668D1D124}" type="datetimeFigureOut">
               <a:rPr kumimoji="1" lang="ja-JP" altLang="en-US" smtClean="0"/>
               <a:t>2026/7/30</a:t>
             </a:fld>
@@ -2935,7 +2935,7 @@
           <p:cNvPr id="6" name="フッター プレースホルダー 5">
             <a:extLst>
               <a:ext uri="{FF2B5EF4-FFF2-40B4-BE49-F238E27FC236}">
-                <a16:creationId xmlns:a16="http://schemas.microsoft.com/office/drawing/2014/main" id="{CCAE05C9-18B3-F88D-EC3E-042EF4BA2D53}"/>
+                <a16:creationId xmlns:a16="http://schemas.microsoft.com/office/drawing/2014/main" id="{0FE8E3E5-791F-66B1-0C53-FD5F8016DE55}"/>
               </a:ext>
             </a:extLst>
           </p:cNvPr>
@@ -2960,7 +2960,7 @@
           <p:cNvPr id="7" name="スライド番号プレースホルダー 6">
             <a:extLst>
               <a:ext uri="{FF2B5EF4-FFF2-40B4-BE49-F238E27FC236}">
-                <a16:creationId xmlns:a16="http://schemas.microsoft.com/office/drawing/2014/main" id="{CFDE4309-F71C-FE8E-3160-C32F7FB2B9B2}"/>
+                <a16:creationId xmlns:a16="http://schemas.microsoft.com/office/drawing/2014/main" id="{BF0C08C2-7424-0F15-5C75-CA702C8FDAD5}"/>
               </a:ext>
             </a:extLst>
           </p:cNvPr>
@@ -2976,7 +2976,7 @@
           <a:bodyPr/>
           <a:lstStyle/>
           <a:p>
-            <a:fld id="{53568302-EB8F-42C1-853D-02762BEE82E9}" type="slidenum">
+            <a:fld id="{A094DCAC-7CC2-42C0-B2FE-182DD5D9BC28}" type="slidenum">
               <a:rPr kumimoji="1" lang="ja-JP" altLang="en-US" smtClean="0"/>
               <a:t>‹#›</a:t>
             </a:fld>
@@ -2987,7 +2987,7 @@
     </p:spTree>
     <p:extLst>
       <p:ext uri="{BB962C8B-B14F-4D97-AF65-F5344CB8AC3E}">
-        <p14:creationId xmlns:p14="http://schemas.microsoft.com/office/powerpoint/2010/main" val="984700790"/>
+        <p14:creationId xmlns:p14="http://schemas.microsoft.com/office/powerpoint/2010/main" val="769541521"/>
       </p:ext>
     </p:extLst>
   </p:cSld>
@@ -3024,7 +3024,7 @@
           <p:cNvPr id="2" name="タイトル プレースホルダー 1">
             <a:extLst>
               <a:ext uri="{FF2B5EF4-FFF2-40B4-BE49-F238E27FC236}">
-                <a16:creationId xmlns:a16="http://schemas.microsoft.com/office/drawing/2014/main" id="{9E00AAF2-7A9F-61E9-A90C-429F40A9C8D3}"/>
+                <a16:creationId xmlns:a16="http://schemas.microsoft.com/office/drawing/2014/main" id="{469DB73A-FE83-34BC-BB1A-C44F9557A2F1}"/>
               </a:ext>
             </a:extLst>
           </p:cNvPr>
@@ -3062,7 +3062,7 @@
           <p:cNvPr id="3" name="テキスト プレースホルダー 2">
             <a:extLst>
               <a:ext uri="{FF2B5EF4-FFF2-40B4-BE49-F238E27FC236}">
-                <a16:creationId xmlns:a16="http://schemas.microsoft.com/office/drawing/2014/main" id="{19D3D82F-C718-A437-B9B3-69F5549154BD}"/>
+                <a16:creationId xmlns:a16="http://schemas.microsoft.com/office/drawing/2014/main" id="{AFB5B83E-C4A6-D638-E07B-D4A8100A3C18}"/>
               </a:ext>
             </a:extLst>
           </p:cNvPr>
@@ -3161,7 +3161,7 @@
           <p:cNvPr id="4" name="日付プレースホルダー 3">
             <a:extLst>
               <a:ext uri="{FF2B5EF4-FFF2-40B4-BE49-F238E27FC236}">
-                <a16:creationId xmlns:a16="http://schemas.microsoft.com/office/drawing/2014/main" id="{C1FF30C6-75CB-D490-B2BD-CA4F1798BB1F}"/>
+                <a16:creationId xmlns:a16="http://schemas.microsoft.com/office/drawing/2014/main" id="{AAF0B405-7482-18E8-4CDD-C372759A6952}"/>
               </a:ext>
             </a:extLst>
           </p:cNvPr>
@@ -3195,7 +3195,7 @@
             </a:lvl1pPr>
           </a:lstStyle>
           <a:p>
-            <a:fld id="{BDF9E524-444D-42E1-A37D-856CCDBEF80D}" type="datetimeFigureOut">
+            <a:fld id="{9E36C393-6375-4B6A-910C-D8F668D1D124}" type="datetimeFigureOut">
               <a:rPr kumimoji="1" lang="ja-JP" altLang="en-US" smtClean="0"/>
               <a:t>2026/7/30</a:t>
             </a:fld>
@@ -3208,7 +3208,7 @@
           <p:cNvPr id="5" name="フッター プレースホルダー 4">
             <a:extLst>
               <a:ext uri="{FF2B5EF4-FFF2-40B4-BE49-F238E27FC236}">
-                <a16:creationId xmlns:a16="http://schemas.microsoft.com/office/drawing/2014/main" id="{449D1F63-16F1-3E6E-7C21-E5E34392D042}"/>
+                <a16:creationId xmlns:a16="http://schemas.microsoft.com/office/drawing/2014/main" id="{F331C13B-7990-23C7-C670-8572D1CCCD85}"/>
               </a:ext>
             </a:extLst>
           </p:cNvPr>
@@ -3251,7 +3251,7 @@
           <p:cNvPr id="6" name="スライド番号プレースホルダー 5">
             <a:extLst>
               <a:ext uri="{FF2B5EF4-FFF2-40B4-BE49-F238E27FC236}">
-                <a16:creationId xmlns:a16="http://schemas.microsoft.com/office/drawing/2014/main" id="{7368F9E3-114D-E5AD-4B44-07F54D2D3C3C}"/>
+                <a16:creationId xmlns:a16="http://schemas.microsoft.com/office/drawing/2014/main" id="{D4A23B16-B5FF-B87E-B24F-B111E13C09A4}"/>
               </a:ext>
             </a:extLst>
           </p:cNvPr>
@@ -3285,7 +3285,7 @@
             </a:lvl1pPr>
           </a:lstStyle>
           <a:p>
-            <a:fld id="{53568302-EB8F-42C1-853D-02762BEE82E9}" type="slidenum">
+            <a:fld id="{A094DCAC-7CC2-42C0-B2FE-182DD5D9BC28}" type="slidenum">
               <a:rPr kumimoji="1" lang="ja-JP" altLang="en-US" smtClean="0"/>
               <a:t>‹#›</a:t>
             </a:fld>
@@ -3296,7 +3296,7 @@
     </p:spTree>
     <p:extLst>
       <p:ext uri="{BB962C8B-B14F-4D97-AF65-F5344CB8AC3E}">
-        <p14:creationId xmlns:p14="http://schemas.microsoft.com/office/powerpoint/2010/main" val="2244811029"/>
+        <p14:creationId xmlns:p14="http://schemas.microsoft.com/office/powerpoint/2010/main" val="4130682483"/>
       </p:ext>
     </p:extLst>
   </p:cSld>
@@ -3619,7 +3619,7 @@
           <p:cNvPr id="2" name="テキスト ボックス 1">
             <a:extLst>
               <a:ext uri="{FF2B5EF4-FFF2-40B4-BE49-F238E27FC236}">
-                <a16:creationId xmlns:a16="http://schemas.microsoft.com/office/drawing/2014/main" id="{6186F5C8-4D09-D946-F81A-7CE1C8B97A92}"/>
+                <a16:creationId xmlns:a16="http://schemas.microsoft.com/office/drawing/2014/main" id="{4A853C1A-05C9-9C9A-2EF2-1C26012816B9}"/>
               </a:ext>
             </a:extLst>
           </p:cNvPr>
@@ -3665,7 +3665,7 @@
           <p:cNvPr id="3" name="テキスト ボックス 2">
             <a:extLst>
               <a:ext uri="{FF2B5EF4-FFF2-40B4-BE49-F238E27FC236}">
-                <a16:creationId xmlns:a16="http://schemas.microsoft.com/office/drawing/2014/main" id="{0F85F27E-4041-36F3-1B7A-658AFE79434D}"/>
+                <a16:creationId xmlns:a16="http://schemas.microsoft.com/office/drawing/2014/main" id="{564346D3-360F-AFD7-AAF0-7E65E72B2A58}"/>
               </a:ext>
             </a:extLst>
           </p:cNvPr>
@@ -3714,7 +3714,7 @@
           <p:cNvPr id="4" name="テキスト ボックス 3">
             <a:extLst>
               <a:ext uri="{FF2B5EF4-FFF2-40B4-BE49-F238E27FC236}">
-                <a16:creationId xmlns:a16="http://schemas.microsoft.com/office/drawing/2014/main" id="{1CA4FEC4-E332-E2E7-0C10-8FE16F5283CE}"/>
+                <a16:creationId xmlns:a16="http://schemas.microsoft.com/office/drawing/2014/main" id="{513A8CC1-EDF8-F5D3-6589-DB85073AE779}"/>
               </a:ext>
             </a:extLst>
           </p:cNvPr>
@@ -3754,7 +3754,7 @@
           <p:cNvPr id="5" name="テキスト ボックス 4">
             <a:extLst>
               <a:ext uri="{FF2B5EF4-FFF2-40B4-BE49-F238E27FC236}">
-                <a16:creationId xmlns:a16="http://schemas.microsoft.com/office/drawing/2014/main" id="{F38CC7FF-F2F4-537F-BCC9-B331EF2DD7C3}"/>
+                <a16:creationId xmlns:a16="http://schemas.microsoft.com/office/drawing/2014/main" id="{BFD04730-090B-C543-BA77-55E4F04B47EE}"/>
               </a:ext>
             </a:extLst>
           </p:cNvPr>
@@ -3801,7 +3801,7 @@
             <a:hlinkClick r:id="" action="ppaction://media"/>
             <a:extLst>
               <a:ext uri="{FF2B5EF4-FFF2-40B4-BE49-F238E27FC236}">
-                <a16:creationId xmlns:a16="http://schemas.microsoft.com/office/drawing/2014/main" id="{B6E3925F-DE3E-2471-CD8C-A2C18DCFCF84}"/>
+                <a16:creationId xmlns:a16="http://schemas.microsoft.com/office/drawing/2014/main" id="{848339BE-4FAB-6778-7A23-A8A6B4D025E4}"/>
               </a:ext>
             </a:extLst>
           </p:cNvPr>
@@ -3836,7 +3836,7 @@
     </p:spTree>
     <p:extLst>
       <p:ext uri="{BB962C8B-B14F-4D97-AF65-F5344CB8AC3E}">
-        <p14:creationId xmlns:p14="http://schemas.microsoft.com/office/powerpoint/2010/main" val="1756000288"/>
+        <p14:creationId xmlns:p14="http://schemas.microsoft.com/office/powerpoint/2010/main" val="2481006050"/>
       </p:ext>
     </p:extLst>
   </p:cSld>
@@ -3960,7 +3960,7 @@
           <p:cNvPr id="2" name="テキスト ボックス 1">
             <a:extLst>
               <a:ext uri="{FF2B5EF4-FFF2-40B4-BE49-F238E27FC236}">
-                <a16:creationId xmlns:a16="http://schemas.microsoft.com/office/drawing/2014/main" id="{1B293E16-A3D3-D7C7-AF62-C09D00C03F41}"/>
+                <a16:creationId xmlns:a16="http://schemas.microsoft.com/office/drawing/2014/main" id="{C9AC3F8A-1FD5-F3D4-9F75-5BEADF180679}"/>
               </a:ext>
             </a:extLst>
           </p:cNvPr>
@@ -4006,7 +4006,7 @@
           <p:cNvPr id="3" name="テキスト ボックス 2">
             <a:extLst>
               <a:ext uri="{FF2B5EF4-FFF2-40B4-BE49-F238E27FC236}">
-                <a16:creationId xmlns:a16="http://schemas.microsoft.com/office/drawing/2014/main" id="{EB9049D0-D997-50B8-582B-67E6C5A1568C}"/>
+                <a16:creationId xmlns:a16="http://schemas.microsoft.com/office/drawing/2014/main" id="{3D5A33E7-982D-0A6B-62B1-A36B1CF02FB0}"/>
               </a:ext>
             </a:extLst>
           </p:cNvPr>
@@ -4046,7 +4046,7 @@
           <p:cNvPr id="4" name="テキスト ボックス 3">
             <a:extLst>
               <a:ext uri="{FF2B5EF4-FFF2-40B4-BE49-F238E27FC236}">
-                <a16:creationId xmlns:a16="http://schemas.microsoft.com/office/drawing/2014/main" id="{C50B8850-7AEA-9ED0-3EAD-7E32E203C26E}"/>
+                <a16:creationId xmlns:a16="http://schemas.microsoft.com/office/drawing/2014/main" id="{CA05DB6C-15F3-8950-47DD-19F84CC34E4A}"/>
               </a:ext>
             </a:extLst>
           </p:cNvPr>
@@ -4110,7 +4110,7 @@
           <p:cNvPr id="5" name="テキスト ボックス 4">
             <a:extLst>
               <a:ext uri="{FF2B5EF4-FFF2-40B4-BE49-F238E27FC236}">
-                <a16:creationId xmlns:a16="http://schemas.microsoft.com/office/drawing/2014/main" id="{830B3B99-4CE8-2B16-0643-7CDA92A6ADAA}"/>
+                <a16:creationId xmlns:a16="http://schemas.microsoft.com/office/drawing/2014/main" id="{CC1A43B8-ECFB-558E-3155-C8B15E936EA2}"/>
               </a:ext>
             </a:extLst>
           </p:cNvPr>
@@ -4157,7 +4157,7 @@
             <a:hlinkClick r:id="" action="ppaction://media"/>
             <a:extLst>
               <a:ext uri="{FF2B5EF4-FFF2-40B4-BE49-F238E27FC236}">
-                <a16:creationId xmlns:a16="http://schemas.microsoft.com/office/drawing/2014/main" id="{1A4B6DF2-7AFD-A8EB-12F8-188F6ED41EFD}"/>
+                <a16:creationId xmlns:a16="http://schemas.microsoft.com/office/drawing/2014/main" id="{C3C713FB-83B1-622D-3739-146F320988BB}"/>
               </a:ext>
             </a:extLst>
           </p:cNvPr>
@@ -4192,7 +4192,7 @@
     </p:spTree>
     <p:extLst>
       <p:ext uri="{BB962C8B-B14F-4D97-AF65-F5344CB8AC3E}">
-        <p14:creationId xmlns:p14="http://schemas.microsoft.com/office/powerpoint/2010/main" val="1374864635"/>
+        <p14:creationId xmlns:p14="http://schemas.microsoft.com/office/powerpoint/2010/main" val="1689649208"/>
       </p:ext>
     </p:extLst>
   </p:cSld>
@@ -4316,7 +4316,7 @@
           <p:cNvPr id="2" name="テキスト ボックス 1">
             <a:extLst>
               <a:ext uri="{FF2B5EF4-FFF2-40B4-BE49-F238E27FC236}">
-                <a16:creationId xmlns:a16="http://schemas.microsoft.com/office/drawing/2014/main" id="{9AEC55E6-3EC5-102D-3ED7-3EA59BB470AA}"/>
+                <a16:creationId xmlns:a16="http://schemas.microsoft.com/office/drawing/2014/main" id="{7A3A20BE-101A-62F1-FDD7-6B86724F4A6A}"/>
               </a:ext>
             </a:extLst>
           </p:cNvPr>
@@ -4362,7 +4362,7 @@
           <p:cNvPr id="3" name="テキスト ボックス 2">
             <a:extLst>
               <a:ext uri="{FF2B5EF4-FFF2-40B4-BE49-F238E27FC236}">
-                <a16:creationId xmlns:a16="http://schemas.microsoft.com/office/drawing/2014/main" id="{02A3F359-7E5B-5736-9E2E-E833A8B94C05}"/>
+                <a16:creationId xmlns:a16="http://schemas.microsoft.com/office/drawing/2014/main" id="{B78C3C54-AF21-6A32-68F3-1C7C82CFB074}"/>
               </a:ext>
             </a:extLst>
           </p:cNvPr>
@@ -4402,7 +4402,7 @@
           <p:cNvPr id="4" name="テキスト ボックス 3">
             <a:extLst>
               <a:ext uri="{FF2B5EF4-FFF2-40B4-BE49-F238E27FC236}">
-                <a16:creationId xmlns:a16="http://schemas.microsoft.com/office/drawing/2014/main" id="{280B6843-1550-F805-F1CD-6223694111A0}"/>
+                <a16:creationId xmlns:a16="http://schemas.microsoft.com/office/drawing/2014/main" id="{B67C893C-2717-16F7-01F5-B1C0DF1CCBE3}"/>
               </a:ext>
             </a:extLst>
           </p:cNvPr>
@@ -4497,7 +4497,7 @@
           <p:cNvPr id="5" name="テキスト ボックス 4">
             <a:extLst>
               <a:ext uri="{FF2B5EF4-FFF2-40B4-BE49-F238E27FC236}">
-                <a16:creationId xmlns:a16="http://schemas.microsoft.com/office/drawing/2014/main" id="{FFCAF5BA-82A5-8381-8101-C8655125A6F1}"/>
+                <a16:creationId xmlns:a16="http://schemas.microsoft.com/office/drawing/2014/main" id="{FC6C8681-9924-2031-A4E1-1414EBF49703}"/>
               </a:ext>
             </a:extLst>
           </p:cNvPr>
@@ -4544,7 +4544,7 @@
             <a:hlinkClick r:id="" action="ppaction://media"/>
             <a:extLst>
               <a:ext uri="{FF2B5EF4-FFF2-40B4-BE49-F238E27FC236}">
-                <a16:creationId xmlns:a16="http://schemas.microsoft.com/office/drawing/2014/main" id="{65AEC06C-E1E4-1A8A-EA55-469A1AC8E049}"/>
+                <a16:creationId xmlns:a16="http://schemas.microsoft.com/office/drawing/2014/main" id="{C3C52096-9321-2BC4-9F3F-B415231EFC02}"/>
               </a:ext>
             </a:extLst>
           </p:cNvPr>
@@ -4579,7 +4579,7 @@
     </p:spTree>
     <p:extLst>
       <p:ext uri="{BB962C8B-B14F-4D97-AF65-F5344CB8AC3E}">
-        <p14:creationId xmlns:p14="http://schemas.microsoft.com/office/powerpoint/2010/main" val="390781699"/>
+        <p14:creationId xmlns:p14="http://schemas.microsoft.com/office/powerpoint/2010/main" val="1836064898"/>
       </p:ext>
     </p:extLst>
   </p:cSld>
@@ -4703,7 +4703,7 @@
           <p:cNvPr id="2" name="テキスト ボックス 1">
             <a:extLst>
               <a:ext uri="{FF2B5EF4-FFF2-40B4-BE49-F238E27FC236}">
-                <a16:creationId xmlns:a16="http://schemas.microsoft.com/office/drawing/2014/main" id="{B430C9E2-D791-0B90-E36A-CD29FF9B71EA}"/>
+                <a16:creationId xmlns:a16="http://schemas.microsoft.com/office/drawing/2014/main" id="{2901D5DA-BACC-090B-1101-22A7446F082E}"/>
               </a:ext>
             </a:extLst>
           </p:cNvPr>
@@ -4749,7 +4749,7 @@
           <p:cNvPr id="3" name="テキスト ボックス 2">
             <a:extLst>
               <a:ext uri="{FF2B5EF4-FFF2-40B4-BE49-F238E27FC236}">
-                <a16:creationId xmlns:a16="http://schemas.microsoft.com/office/drawing/2014/main" id="{5B69B908-E1F6-6880-DF01-511EF5F94685}"/>
+                <a16:creationId xmlns:a16="http://schemas.microsoft.com/office/drawing/2014/main" id="{3C454850-A757-F802-7E5D-3F0DC23DE9AB}"/>
               </a:ext>
             </a:extLst>
           </p:cNvPr>
@@ -4789,7 +4789,7 @@
           <p:cNvPr id="4" name="テキスト ボックス 3">
             <a:extLst>
               <a:ext uri="{FF2B5EF4-FFF2-40B4-BE49-F238E27FC236}">
-                <a16:creationId xmlns:a16="http://schemas.microsoft.com/office/drawing/2014/main" id="{5DF0921C-9CD1-3DC5-C7F9-FD986CA50490}"/>
+                <a16:creationId xmlns:a16="http://schemas.microsoft.com/office/drawing/2014/main" id="{16109E9C-C6CD-F739-FD74-4763550DE123}"/>
               </a:ext>
             </a:extLst>
           </p:cNvPr>
@@ -4899,7 +4899,7 @@
           <p:cNvPr id="5" name="テキスト ボックス 4">
             <a:extLst>
               <a:ext uri="{FF2B5EF4-FFF2-40B4-BE49-F238E27FC236}">
-                <a16:creationId xmlns:a16="http://schemas.microsoft.com/office/drawing/2014/main" id="{FE222494-91A8-BC66-7E39-913CF6E258FE}"/>
+                <a16:creationId xmlns:a16="http://schemas.microsoft.com/office/drawing/2014/main" id="{95D0229B-6FD8-C8CF-C323-4D9D57CEBAB6}"/>
               </a:ext>
             </a:extLst>
           </p:cNvPr>
@@ -4946,7 +4946,7 @@
             <a:hlinkClick r:id="" action="ppaction://media"/>
             <a:extLst>
               <a:ext uri="{FF2B5EF4-FFF2-40B4-BE49-F238E27FC236}">
-                <a16:creationId xmlns:a16="http://schemas.microsoft.com/office/drawing/2014/main" id="{441CC84C-7850-504D-38F7-F0CA366FF523}"/>
+                <a16:creationId xmlns:a16="http://schemas.microsoft.com/office/drawing/2014/main" id="{029C403C-97D9-B2A1-20A7-8647A8F0B963}"/>
               </a:ext>
             </a:extLst>
           </p:cNvPr>
@@ -4981,7 +4981,7 @@
     </p:spTree>
     <p:extLst>
       <p:ext uri="{BB962C8B-B14F-4D97-AF65-F5344CB8AC3E}">
-        <p14:creationId xmlns:p14="http://schemas.microsoft.com/office/powerpoint/2010/main" val="2460152245"/>
+        <p14:creationId xmlns:p14="http://schemas.microsoft.com/office/powerpoint/2010/main" val="2758053631"/>
       </p:ext>
     </p:extLst>
   </p:cSld>
@@ -5105,7 +5105,7 @@
           <p:cNvPr id="2" name="テキスト ボックス 1">
             <a:extLst>
               <a:ext uri="{FF2B5EF4-FFF2-40B4-BE49-F238E27FC236}">
-                <a16:creationId xmlns:a16="http://schemas.microsoft.com/office/drawing/2014/main" id="{9CEB4E1F-BC6F-8679-F1E0-75341CE0BC0D}"/>
+                <a16:creationId xmlns:a16="http://schemas.microsoft.com/office/drawing/2014/main" id="{E410FFF8-EC2D-9781-7F96-2F883E11002A}"/>
               </a:ext>
             </a:extLst>
           </p:cNvPr>
@@ -5151,7 +5151,7 @@
           <p:cNvPr id="3" name="テキスト ボックス 2">
             <a:extLst>
               <a:ext uri="{FF2B5EF4-FFF2-40B4-BE49-F238E27FC236}">
-                <a16:creationId xmlns:a16="http://schemas.microsoft.com/office/drawing/2014/main" id="{38B30FAF-E3E1-4D3A-7D04-3DAB899DC7EA}"/>
+                <a16:creationId xmlns:a16="http://schemas.microsoft.com/office/drawing/2014/main" id="{95D37206-9633-39CC-E791-3B610053A44D}"/>
               </a:ext>
             </a:extLst>
           </p:cNvPr>
@@ -5191,7 +5191,7 @@
           <p:cNvPr id="4" name="テキスト ボックス 3">
             <a:extLst>
               <a:ext uri="{FF2B5EF4-FFF2-40B4-BE49-F238E27FC236}">
-                <a16:creationId xmlns:a16="http://schemas.microsoft.com/office/drawing/2014/main" id="{DCB7CECE-2800-B254-1F60-66BFA9088DE4}"/>
+                <a16:creationId xmlns:a16="http://schemas.microsoft.com/office/drawing/2014/main" id="{3428889D-EA12-79A9-010D-39CEE7CB0779}"/>
               </a:ext>
             </a:extLst>
           </p:cNvPr>
@@ -5215,20 +5215,14 @@
           <a:lstStyle/>
           <a:p>
             <a:r>
-              <a:rPr kumimoji="1" lang="en-US" altLang="ja-JP" sz="2000">
+              <a:rPr kumimoji="1" lang="ja-JP" altLang="en-US" sz="2000">
                 <a:solidFill>
                   <a:srgbClr val="333333"/>
                 </a:solidFill>
                 <a:latin typeface="Arial" panose="020B0604020202020204" pitchFamily="34" charset="0"/>
               </a:rPr>
-              <a:t>Set confirmed custom domain</a:t>
-            </a:r>
-            <a:endParaRPr kumimoji="1" lang="ja-JP" altLang="en-US" sz="2000">
-              <a:solidFill>
-                <a:srgbClr val="333333"/>
-              </a:solidFill>
-              <a:latin typeface="Arial" panose="020B0604020202020204" pitchFamily="34" charset="0"/>
-            </a:endParaRPr>
+              <a:t>直近のコミットでは、実装の見直しと継続的な改善が行われました。</a:t>
+            </a:r>
           </a:p>
         </p:txBody>
       </p:sp>
@@ -5237,7 +5231,7 @@
           <p:cNvPr id="5" name="テキスト ボックス 4">
             <a:extLst>
               <a:ext uri="{FF2B5EF4-FFF2-40B4-BE49-F238E27FC236}">
-                <a16:creationId xmlns:a16="http://schemas.microsoft.com/office/drawing/2014/main" id="{C1679EDF-5A2A-93A7-34C3-1EC6373251C9}"/>
+                <a16:creationId xmlns:a16="http://schemas.microsoft.com/office/drawing/2014/main" id="{A78D71E6-3AB1-1F0A-577F-DB18682F86C7}"/>
               </a:ext>
             </a:extLst>
           </p:cNvPr>
@@ -5284,7 +5278,7 @@
             <a:hlinkClick r:id="" action="ppaction://media"/>
             <a:extLst>
               <a:ext uri="{FF2B5EF4-FFF2-40B4-BE49-F238E27FC236}">
-                <a16:creationId xmlns:a16="http://schemas.microsoft.com/office/drawing/2014/main" id="{8F452FCB-1EF8-2AB9-BABE-B56BBD59D002}"/>
+                <a16:creationId xmlns:a16="http://schemas.microsoft.com/office/drawing/2014/main" id="{480DBF49-2B6B-18DB-0406-34D080FBE1E4}"/>
               </a:ext>
             </a:extLst>
           </p:cNvPr>
@@ -5319,7 +5313,7 @@
     </p:spTree>
     <p:extLst>
       <p:ext uri="{BB962C8B-B14F-4D97-AF65-F5344CB8AC3E}">
-        <p14:creationId xmlns:p14="http://schemas.microsoft.com/office/powerpoint/2010/main" val="2581896421"/>
+        <p14:creationId xmlns:p14="http://schemas.microsoft.com/office/powerpoint/2010/main" val="1740108717"/>
       </p:ext>
     </p:extLst>
   </p:cSld>
@@ -5362,7 +5356,7 @@
                                   <p:childTnLst>
                                     <p:cmd type="call" cmd="playFrom(0.0)">
                                       <p:cBhvr>
-                                        <p:cTn id="6" dur="6451" fill="hold"/>
+                                        <p:cTn id="6" dur="6076" fill="hold"/>
                                         <p:tgtEl>
                                           <p:spTgt spid="6"/>
                                         </p:tgtEl>
@@ -5443,7 +5437,7 @@
           <p:cNvPr id="2" name="テキスト ボックス 1">
             <a:extLst>
               <a:ext uri="{FF2B5EF4-FFF2-40B4-BE49-F238E27FC236}">
-                <a16:creationId xmlns:a16="http://schemas.microsoft.com/office/drawing/2014/main" id="{020F1456-6795-F37C-0FFF-6A1733E2810D}"/>
+                <a16:creationId xmlns:a16="http://schemas.microsoft.com/office/drawing/2014/main" id="{253263A6-3F6F-D57F-6E49-14D03220BF9B}"/>
               </a:ext>
             </a:extLst>
           </p:cNvPr>
@@ -5489,7 +5483,7 @@
           <p:cNvPr id="3" name="テキスト ボックス 2">
             <a:extLst>
               <a:ext uri="{FF2B5EF4-FFF2-40B4-BE49-F238E27FC236}">
-                <a16:creationId xmlns:a16="http://schemas.microsoft.com/office/drawing/2014/main" id="{37DEE4BE-F341-7661-9FC4-4C70EA780175}"/>
+                <a16:creationId xmlns:a16="http://schemas.microsoft.com/office/drawing/2014/main" id="{5A253156-66E9-76CA-D20E-84D4D9D80FF3}"/>
               </a:ext>
             </a:extLst>
           </p:cNvPr>
@@ -5529,7 +5523,7 @@
           <p:cNvPr id="4" name="テキスト ボックス 3">
             <a:extLst>
               <a:ext uri="{FF2B5EF4-FFF2-40B4-BE49-F238E27FC236}">
-                <a16:creationId xmlns:a16="http://schemas.microsoft.com/office/drawing/2014/main" id="{C0AEB888-F986-F6C3-4361-7E3C48CDC414}"/>
+                <a16:creationId xmlns:a16="http://schemas.microsoft.com/office/drawing/2014/main" id="{8CBF4648-EB92-E9A7-0138-68EF7C641526}"/>
               </a:ext>
             </a:extLst>
           </p:cNvPr>
@@ -5594,7 +5588,7 @@
           <p:cNvPr id="5" name="テキスト ボックス 4">
             <a:extLst>
               <a:ext uri="{FF2B5EF4-FFF2-40B4-BE49-F238E27FC236}">
-                <a16:creationId xmlns:a16="http://schemas.microsoft.com/office/drawing/2014/main" id="{155F4A45-8068-6F32-865D-A33A6D889B14}"/>
+                <a16:creationId xmlns:a16="http://schemas.microsoft.com/office/drawing/2014/main" id="{9430E4B7-019A-44ED-7869-EBE45B2FD1F7}"/>
               </a:ext>
             </a:extLst>
           </p:cNvPr>
@@ -5641,7 +5635,7 @@
             <a:hlinkClick r:id="" action="ppaction://media"/>
             <a:extLst>
               <a:ext uri="{FF2B5EF4-FFF2-40B4-BE49-F238E27FC236}">
-                <a16:creationId xmlns:a16="http://schemas.microsoft.com/office/drawing/2014/main" id="{CFF39082-1F43-1632-A85A-0C55177F7267}"/>
+                <a16:creationId xmlns:a16="http://schemas.microsoft.com/office/drawing/2014/main" id="{1FD8A71F-BF88-92C8-BBD9-4C3DBD6B30CD}"/>
               </a:ext>
             </a:extLst>
           </p:cNvPr>
@@ -5676,7 +5670,7 @@
     </p:spTree>
     <p:extLst>
       <p:ext uri="{BB962C8B-B14F-4D97-AF65-F5344CB8AC3E}">
-        <p14:creationId xmlns:p14="http://schemas.microsoft.com/office/powerpoint/2010/main" val="555327117"/>
+        <p14:creationId xmlns:p14="http://schemas.microsoft.com/office/powerpoint/2010/main" val="2484005794"/>
       </p:ext>
     </p:extLst>
   </p:cSld>
